--- a/Presentation.pptx
+++ b/Presentation.pptx
@@ -4944,7 +4944,7 @@
                   <a:schemeClr val="bg1"/>
                 </a:solidFill>
               </a:rPr>
-              <a:t>1</a:t>
+              <a:t>9</a:t>
             </a:r>
           </a:p>
         </p:txBody>
@@ -6300,8 +6300,8 @@
         </p:nvSpPr>
         <p:spPr>
           <a:xfrm>
-            <a:off x="11644828" y="6286712"/>
-            <a:ext cx="301686" cy="369332"/>
+            <a:off x="11579333" y="6280949"/>
+            <a:ext cx="418704" cy="369332"/>
           </a:xfrm>
           <a:prstGeom prst="rect">
             <a:avLst/>
@@ -6320,7 +6320,7 @@
                   <a:schemeClr val="bg1"/>
                 </a:solidFill>
               </a:rPr>
-              <a:t>1</a:t>
+              <a:t>10</a:t>
             </a:r>
           </a:p>
         </p:txBody>
@@ -6692,8 +6692,8 @@
         </p:nvSpPr>
         <p:spPr>
           <a:xfrm>
-            <a:off x="11644828" y="6286712"/>
-            <a:ext cx="301686" cy="369332"/>
+            <a:off x="11574734" y="6286712"/>
+            <a:ext cx="418704" cy="369332"/>
           </a:xfrm>
           <a:prstGeom prst="rect">
             <a:avLst/>
@@ -6712,7 +6712,7 @@
                   <a:schemeClr val="bg1"/>
                 </a:solidFill>
               </a:rPr>
-              <a:t>1</a:t>
+              <a:t>11</a:t>
             </a:r>
           </a:p>
         </p:txBody>
@@ -8053,8 +8053,8 @@
         </p:nvSpPr>
         <p:spPr>
           <a:xfrm>
-            <a:off x="11644828" y="6286712"/>
-            <a:ext cx="301686" cy="369332"/>
+            <a:off x="11579333" y="6271250"/>
+            <a:ext cx="418704" cy="369332"/>
           </a:xfrm>
           <a:prstGeom prst="rect">
             <a:avLst/>
@@ -8073,7 +8073,7 @@
                   <a:schemeClr val="bg1"/>
                 </a:solidFill>
               </a:rPr>
-              <a:t>1</a:t>
+              <a:t>12</a:t>
             </a:r>
           </a:p>
         </p:txBody>
@@ -8408,8 +8408,8 @@
         </p:nvSpPr>
         <p:spPr>
           <a:xfrm>
-            <a:off x="11644828" y="6286712"/>
-            <a:ext cx="301686" cy="369332"/>
+            <a:off x="11583932" y="6261770"/>
+            <a:ext cx="418704" cy="369332"/>
           </a:xfrm>
           <a:prstGeom prst="rect">
             <a:avLst/>
@@ -8428,7 +8428,7 @@
                   <a:schemeClr val="bg1"/>
                 </a:solidFill>
               </a:rPr>
-              <a:t>1</a:t>
+              <a:t>13</a:t>
             </a:r>
           </a:p>
         </p:txBody>
@@ -8763,8 +8763,8 @@
         </p:nvSpPr>
         <p:spPr>
           <a:xfrm>
-            <a:off x="11644828" y="6286712"/>
-            <a:ext cx="301686" cy="369332"/>
+            <a:off x="11583932" y="6286712"/>
+            <a:ext cx="418704" cy="369332"/>
           </a:xfrm>
           <a:prstGeom prst="rect">
             <a:avLst/>
@@ -8783,7 +8783,7 @@
                   <a:schemeClr val="bg1"/>
                 </a:solidFill>
               </a:rPr>
-              <a:t>1</a:t>
+              <a:t>14</a:t>
             </a:r>
           </a:p>
         </p:txBody>
@@ -9118,8 +9118,8 @@
         </p:nvSpPr>
         <p:spPr>
           <a:xfrm>
-            <a:off x="11644828" y="6286712"/>
-            <a:ext cx="301686" cy="369332"/>
+            <a:off x="11583932" y="6281112"/>
+            <a:ext cx="418704" cy="369332"/>
           </a:xfrm>
           <a:prstGeom prst="rect">
             <a:avLst/>
@@ -9138,7 +9138,7 @@
                   <a:schemeClr val="bg1"/>
                 </a:solidFill>
               </a:rPr>
-              <a:t>1</a:t>
+              <a:t>15</a:t>
             </a:r>
           </a:p>
         </p:txBody>
@@ -10473,8 +10473,8 @@
         </p:nvSpPr>
         <p:spPr>
           <a:xfrm>
-            <a:off x="11644828" y="6286712"/>
-            <a:ext cx="301686" cy="369332"/>
+            <a:off x="11581768" y="6286712"/>
+            <a:ext cx="418704" cy="369332"/>
           </a:xfrm>
           <a:prstGeom prst="rect">
             <a:avLst/>
@@ -10493,7 +10493,7 @@
                   <a:schemeClr val="bg1"/>
                 </a:solidFill>
               </a:rPr>
-              <a:t>1</a:t>
+              <a:t>16</a:t>
             </a:r>
           </a:p>
         </p:txBody>
@@ -10982,8 +10982,8 @@
         </p:nvSpPr>
         <p:spPr>
           <a:xfrm>
-            <a:off x="11644828" y="6286712"/>
-            <a:ext cx="301686" cy="369332"/>
+            <a:off x="11583932" y="6286712"/>
+            <a:ext cx="418704" cy="369332"/>
           </a:xfrm>
           <a:prstGeom prst="rect">
             <a:avLst/>
@@ -11002,7 +11002,7 @@
                   <a:schemeClr val="bg1"/>
                 </a:solidFill>
               </a:rPr>
-              <a:t>1</a:t>
+              <a:t>17</a:t>
             </a:r>
           </a:p>
         </p:txBody>
@@ -11316,8 +11316,8 @@
         </p:nvSpPr>
         <p:spPr>
           <a:xfrm>
-            <a:off x="11644828" y="6286712"/>
-            <a:ext cx="301686" cy="369332"/>
+            <a:off x="11583932" y="6286712"/>
+            <a:ext cx="418704" cy="369332"/>
           </a:xfrm>
           <a:prstGeom prst="rect">
             <a:avLst/>
@@ -11336,7 +11336,7 @@
                   <a:schemeClr val="bg1"/>
                 </a:solidFill>
               </a:rPr>
-              <a:t>1</a:t>
+              <a:t>18</a:t>
             </a:r>
           </a:p>
         </p:txBody>
@@ -12323,8 +12323,8 @@
         </p:nvSpPr>
         <p:spPr>
           <a:xfrm>
-            <a:off x="11644828" y="6286712"/>
-            <a:ext cx="301686" cy="369332"/>
+            <a:off x="11583932" y="6286712"/>
+            <a:ext cx="418704" cy="369332"/>
           </a:xfrm>
           <a:prstGeom prst="rect">
             <a:avLst/>
@@ -12343,7 +12343,7 @@
                   <a:schemeClr val="bg1"/>
                 </a:solidFill>
               </a:rPr>
-              <a:t>1</a:t>
+              <a:t>19</a:t>
             </a:r>
           </a:p>
         </p:txBody>
@@ -12682,8 +12682,8 @@
         </p:nvSpPr>
         <p:spPr>
           <a:xfrm>
-            <a:off x="11644828" y="6286712"/>
-            <a:ext cx="301686" cy="369332"/>
+            <a:off x="11583932" y="6287167"/>
+            <a:ext cx="418704" cy="369332"/>
           </a:xfrm>
           <a:prstGeom prst="rect">
             <a:avLst/>
@@ -12702,7 +12702,7 @@
                   <a:schemeClr val="bg1"/>
                 </a:solidFill>
               </a:rPr>
-              <a:t>1</a:t>
+              <a:t>20</a:t>
             </a:r>
           </a:p>
         </p:txBody>
@@ -13081,8 +13081,8 @@
         </p:nvSpPr>
         <p:spPr>
           <a:xfrm>
-            <a:off x="11644828" y="6286712"/>
-            <a:ext cx="301686" cy="369332"/>
+            <a:off x="11583932" y="6286712"/>
+            <a:ext cx="418704" cy="369332"/>
           </a:xfrm>
           <a:prstGeom prst="rect">
             <a:avLst/>
@@ -13101,7 +13101,7 @@
                   <a:schemeClr val="bg1"/>
                 </a:solidFill>
               </a:rPr>
-              <a:t>1</a:t>
+              <a:t>21</a:t>
             </a:r>
           </a:p>
         </p:txBody>
@@ -13589,8 +13589,8 @@
         </p:nvSpPr>
         <p:spPr>
           <a:xfrm>
-            <a:off x="11644828" y="6286712"/>
-            <a:ext cx="301686" cy="369332"/>
+            <a:off x="11583932" y="6286712"/>
+            <a:ext cx="418704" cy="369332"/>
           </a:xfrm>
           <a:prstGeom prst="rect">
             <a:avLst/>
@@ -13609,7 +13609,7 @@
                   <a:schemeClr val="bg1"/>
                 </a:solidFill>
               </a:rPr>
-              <a:t>1</a:t>
+              <a:t>22</a:t>
             </a:r>
           </a:p>
         </p:txBody>
@@ -15127,7 +15127,7 @@
                   <a:schemeClr val="bg1"/>
                 </a:solidFill>
               </a:rPr>
-              <a:t>1</a:t>
+              <a:t>2</a:t>
             </a:r>
           </a:p>
         </p:txBody>
@@ -16494,7 +16494,7 @@
                   <a:schemeClr val="bg1"/>
                 </a:solidFill>
               </a:rPr>
-              <a:t>1</a:t>
+              <a:t>3</a:t>
             </a:r>
           </a:p>
         </p:txBody>
@@ -17184,7 +17184,7 @@
                   <a:schemeClr val="bg1"/>
                 </a:solidFill>
               </a:rPr>
-              <a:t>1</a:t>
+              <a:t>4</a:t>
             </a:r>
           </a:p>
         </p:txBody>
@@ -18557,7 +18557,7 @@
                   <a:schemeClr val="bg1"/>
                 </a:solidFill>
               </a:rPr>
-              <a:t>1</a:t>
+              <a:t>5</a:t>
             </a:r>
           </a:p>
         </p:txBody>
@@ -19284,7 +19284,7 @@
                   <a:schemeClr val="bg1"/>
                 </a:solidFill>
               </a:rPr>
-              <a:t>1</a:t>
+              <a:t>6</a:t>
             </a:r>
           </a:p>
         </p:txBody>
@@ -19911,7 +19911,7 @@
                   <a:schemeClr val="bg1"/>
                 </a:solidFill>
               </a:rPr>
-              <a:t>1</a:t>
+              <a:t>7</a:t>
             </a:r>
           </a:p>
         </p:txBody>
@@ -20587,7 +20587,7 @@
                   <a:schemeClr val="bg1"/>
                 </a:solidFill>
               </a:rPr>
-              <a:t>1</a:t>
+              <a:t>8</a:t>
             </a:r>
           </a:p>
         </p:txBody>

--- a/Presentation.pptx
+++ b/Presentation.pptx
@@ -134,90 +134,6 @@
 </p:presentation>
 </file>
 
-<file path=ppt/ink/ink1.xml><?xml version="1.0" encoding="utf-8"?>
-<inkml:ink xmlns:inkml="http://www.w3.org/2003/InkML">
-  <inkml:definitions>
-    <inkml:context xml:id="ctx0">
-      <inkml:inkSource xml:id="inkSrc0">
-        <inkml:traceFormat>
-          <inkml:channel name="X" type="integer" min="-2.14748E9" max="2.14748E9" units="cm"/>
-          <inkml:channel name="Y" type="integer" min="-2.14748E9" max="2.14748E9" units="cm"/>
-          <inkml:channel name="F" type="integer" max="32767" units="dev"/>
-        </inkml:traceFormat>
-        <inkml:channelProperties>
-          <inkml:channelProperty channel="X" name="resolution" value="1000" units="1/cm"/>
-          <inkml:channelProperty channel="Y" name="resolution" value="1000" units="1/cm"/>
-          <inkml:channelProperty channel="F" name="resolution" value="0" units="1/dev"/>
-        </inkml:channelProperties>
-      </inkml:inkSource>
-      <inkml:timestamp xml:id="ts0" timeString="2026-03-25T13:19:34.622"/>
-    </inkml:context>
-    <inkml:brush xml:id="br0">
-      <inkml:brushProperty name="width" value="0.05" units="cm"/>
-      <inkml:brushProperty name="height" value="0.05" units="cm"/>
-      <inkml:brushProperty name="color" value="#66CC00"/>
-    </inkml:brush>
-  </inkml:definitions>
-  <inkml:trace contextRef="#ctx0" brushRef="#br0">4940 435 24575,'-29'-4'0,"-52"1"0,10-5 0,-16-4 0,-5 0-1508,4 0 1,-6-1 0,-4-1-1,-2-1 1508,19 2 0,-2-1 0,-2-1 0,-1 0 0,-1-1 0,1 0 0,-2 0 0,-1-1 0,0 0 0,0 0 0,1 0 0,3 2 0,-5 0 0,2 1 0,1 1 0,2 1 0,2 0 269,-11-1 1,1 0 0,4 2-1,5 3-269,0 2 0,4 3 0,5 1 0,-20 1 0,7 2 556,19-2 1,5 2-557,4 1 0,-1 4 0,-11 7 0,-4 6 0,-16 8 0,-4 4-164,28-7 1,-2 1 0,-1 0 163,-2 0 0,0 1 0,1-2 0,-21 8 0,6-3 1538,18-7 0,6 0-1538,-25 11 650,46-9-650,23-6 0,11 3 0,-4 7 603,-7 9-603,-9 14 0,-20 22 0,16-25 0,-3 2 0,-4 6 0,-2 1 0,-1-2 0,0-2 0,9-10 0,2-3 0,-7 14 0,19-20 0,15-12 0,7-2 0,13 0 0,25 16 0,30 23 0,-25-20 0,3 3 0,4 6 0,2 1 0,-4-3 0,2 0 0,-1-3 0,2-1 0,1-2 0,1 0 0,2-1 0,2-1 0,7 2 0,2 0 0,4-1 0,2-2 0,5 1 0,2-2 0,-20-10 0,2 1 0,2-2-238,4 1 1,2-1 0,0 0 237,5-1 0,1 1 0,1-2 0,-1 0 0,0 0 0,1-2 0,-2-2 0,0-2 0,0 0 0,-2-1 0,-1-1 0,-1 0 0,-4-2 0,-1-1 0,-1-1 0,24 1 0,-4-1 0,-15-4 0,-4-2 0,-8-3 0,-1-1 0,-1 0 0,0-2 0,10-3 0,3-2 0,16-5 0,4-3 0,-21 1 0,3-3 0,2-1-167,11-2 0,2-2 0,1-1 167,4-2 0,2 0 0,1 0 0,-24 4 0,1 1 0,0-1 0,-1 0 0,23-4 0,-1-1 0,-3 0 0,-10 2 0,-2-1 0,-4 0 0,20-6 0,-8 1 0,-23 5 0,-7 1 0,22-18 0,-20 6 0,-6-1 0,-3 1 1213,-4-2-1213,-3 0 0,-1-3 0,1-5 0,-1-6 0,-2-9 0,-3-18 0,-5-16 0,-15 38 0,-2-2 0,0-2 0,-1 1 0,1 5 0,-2 1 0,9-45 0,-8 5 0,-10 40 0,-4-2 0,-5-7 0,-5-2 0,-6-2 0,-5 1 0,-3 4 0,-3 4 0,-3 8 0,-2 3 0,-25-21 0,8 18 0,2 14 0,2 8 0,-2 4 0,0 1 0,-1 2 0,1 4 0,1 4 0,5 6 0,8 3 0,10 3 0,4 0 0,-2 1 0,-4 5 0,-15 6 0,-11 7 0,-8 4 0,-3 3 0,2 3 0,5 2 0,4 1 0,6-3 0,6-1 0,7-3 0,7-4 0,5-2 0,3-2 0,0 0 0,0-2 0,0 0 0,0-1 0,2 0 0,2 0 0,2 1 0,3 0 0,0-2 0,4-5 0,2-4 0</inkml:trace>
-</inkml:ink>
-</file>
-
-<file path=ppt/ink/ink2.xml><?xml version="1.0" encoding="utf-8"?>
-<inkml:ink xmlns:inkml="http://www.w3.org/2003/InkML">
-  <inkml:definitions>
-    <inkml:context xml:id="ctx0">
-      <inkml:inkSource xml:id="inkSrc0">
-        <inkml:traceFormat>
-          <inkml:channel name="X" type="integer" min="-2.14748E9" max="2.14748E9" units="cm"/>
-          <inkml:channel name="Y" type="integer" min="-2.14748E9" max="2.14748E9" units="cm"/>
-          <inkml:channel name="F" type="integer" max="32767" units="dev"/>
-        </inkml:traceFormat>
-        <inkml:channelProperties>
-          <inkml:channelProperty channel="X" name="resolution" value="1000" units="1/cm"/>
-          <inkml:channelProperty channel="Y" name="resolution" value="1000" units="1/cm"/>
-          <inkml:channelProperty channel="F" name="resolution" value="0" units="1/dev"/>
-        </inkml:channelProperties>
-      </inkml:inkSource>
-      <inkml:timestamp xml:id="ts0" timeString="2026-03-25T13:19:42.660"/>
-    </inkml:context>
-    <inkml:brush xml:id="br0">
-      <inkml:brushProperty name="width" value="0.05" units="cm"/>
-      <inkml:brushProperty name="height" value="0.05" units="cm"/>
-      <inkml:brushProperty name="color" value="#66CC00"/>
-    </inkml:brush>
-  </inkml:definitions>
-  <inkml:trace contextRef="#ctx0" brushRef="#br0">2330 59 24575,'-19'0'0,"-22"0"0,-27 0 0,-24 0 0,39 0 0,-2 0 0,-8 0 0,-2 0 0,-5 0 0,-1 0 0,0 0 0,0 0 0,-1 0 0,2 0 0,7 0 0,1 0 0,1 0 0,0 0 0,0 0 0,0 0 0,0 0 0,1 0 0,-2 0 0,0 0 0,-1 0 0,1 0 0,2 0 0,2 0 0,-41 2 0,25 8 0,24 10 0,16 9 0,13 9 0,5 14 0,-8 21 0,7-24 0,-2 4 0,-5 10 0,-3 2 0,-2 5 0,0 1 0,2-3 0,2-2-3392,3-6 0,4-2 3392,-5 35 0,13-20 0,7-17 0,3-12 0,0-12 0,7-9 0,17 8 6784,23 18-6784,-13-15 0,2 3 0,5 6 0,0 2 0,-1-1 0,0-1 0,-4-6 0,0-2 0,31 20 0,11-7 0,-31-25 0,4-1 0,11 4 0,3 1 0,12 2 0,5-1 0,-18-8 0,3-1 0,2-1-286,6 1 0,1-2 1,2 0 285,7-1 0,1-1 0,2-2 0,6-1 0,1-2 0,0-2-467,1-1 0,1-1 1,0-2 466,-20-2 0,2 0 0,-1-1 0,0 0 0,22 0 0,0-1 0,-2-1 0,-4 1 0,-1 0 0,0 0-305,-3 1 0,-1-1 0,-1-1 305,-1 0 0,-1 0 0,0-2 0,4-1 0,0-1 0,0-2 0,2-2 0,1-2 0,-1-2 0,-2-2 0,-1-1 0,-2-1 0,-3-3 0,-1-1 0,-1-1 0,-6 0 0,-1-2 0,-3 0 0,21-11 0,-6-2 0,-12 1 0,-7-2 378,-16 4 0,-6-1-378,23-33 1387,-20-3-1387,-14 0 1029,-5 0-1029,-9 4 0,-3 5 0,-5 4 0,-5 1 0,-4-1 0,-7-21 0,-16-17 0,3 39 0,-4 0 0,-4-2 0,-4 2 0,0 8 0,-2 3 0,-28-30 0,-4 19 0,-9 9 0,-14 4 0,40 24 0,-1 0 0,-1 0 0,0 1 0,-3 1 0,0-1 0,-6 0 0,-1 0 0,-4-2 0,-1 0 0,-2 0 0,0 1 0,3 1 0,2 1 0,8 3 0,3 2 0,-34-4 0,16 8 0,2 6 0,-12 3 0,-16 0 0,42 0 0,-1 0 0,-2 0 0,0 0 0,-45 0 0,9 0 0,6 0 0,10 0 0,5 2 0,9 4 0,8 3 0,5 2 0,6 0 0,1-2 0,0-1 0,-5-2 0,-3-1 0,1-3 0,-4-1 0,6-1 0,4 0 0,7 0 0,12 0 0,6 0 0,5 0 0,3 0 0,-1 0 0,-7 0 0,-13 0 0,-22 0 0,-23 0 0,-9 0 0,2 0 0,19 0 0,22 0 0,21 0 0,14 0 0,3 0 0,4 0 0</inkml:trace>
-</inkml:ink>
-</file>
-
-<file path=ppt/ink/ink3.xml><?xml version="1.0" encoding="utf-8"?>
-<inkml:ink xmlns:inkml="http://www.w3.org/2003/InkML">
-  <inkml:definitions>
-    <inkml:context xml:id="ctx0">
-      <inkml:inkSource xml:id="inkSrc0">
-        <inkml:traceFormat>
-          <inkml:channel name="X" type="integer" min="-2.14748E9" max="2.14748E9" units="cm"/>
-          <inkml:channel name="Y" type="integer" min="-2.14748E9" max="2.14748E9" units="cm"/>
-          <inkml:channel name="F" type="integer" max="32767" units="dev"/>
-        </inkml:traceFormat>
-        <inkml:channelProperties>
-          <inkml:channelProperty channel="X" name="resolution" value="1000" units="1/cm"/>
-          <inkml:channelProperty channel="Y" name="resolution" value="1000" units="1/cm"/>
-          <inkml:channelProperty channel="F" name="resolution" value="0" units="1/dev"/>
-        </inkml:channelProperties>
-      </inkml:inkSource>
-      <inkml:timestamp xml:id="ts0" timeString="2026-03-25T13:20:02.689"/>
-    </inkml:context>
-    <inkml:brush xml:id="br0">
-      <inkml:brushProperty name="width" value="0.05" units="cm"/>
-      <inkml:brushProperty name="height" value="0.05" units="cm"/>
-      <inkml:brushProperty name="color" value="#66CC00"/>
-    </inkml:brush>
-  </inkml:definitions>
-  <inkml:trace contextRef="#ctx0" brushRef="#br0">1912 0 24575,'11'0'0,"3"0"0,9 0 0,5 0 0,2 4 0,10 25 0,2 19 0,4 18 0,-1 3 0,-10-16 0,-7-10 0,-7-12 0,-4-7 0,-2-5 0,-4-3 0,-1-3 0,0-1 0,2 2 0,2 3 0,5 6 0,2 3 0,1 3 0,-2-2 0,-2-3 0,0-1 0,0-1 0,-1 4 0,-3-2 0,-3 5 0,-1 1 0,0 0 0,-2 9 0,-1 5 0,-3 10 0,-1 4 0,-2-1 0,-1-6 0,0-9 0,0-5 0,0-5 0,0 0 0,0 4 0,-2 3 0,-3 3 0,-4-2 0,-3-2 0,-1-1 0,-1-1 0,0 0 0,0-5 0,0-5 0,-1-7 0,2-6 0,1-3 0,1-3 0,2 0 0,1 1 0,-3 3 0,-1 5 0,-4 6 0,-5 4 0,-2 4 0,1-3 0,4-3 0,3-4 0,2-3 0,3-4 0,2-3 0,2-5 0,-1-3 0,1 0 0,0 0 0,0 0 0,1 0 0,-2-2 0,1 0 0,-1 0 0,-2 0 0,-3 1 0,-2 2 0,-1 2 0,-2 3 0,0-1 0,0 0 0,0-2 0,2-1 0,0 0 0,0 0 0,0 1 0,-2-1 0,0 2 0,0-2 0,0 1 0,0-1 0,2-2 0,2 0 0,3 0 0,2 0 0,-2 0 0,-1 1 0,-4 1 0,-2 2 0,-3 2 0,-3 0 0,3 1 0,0-2 0,3 0 0,3-2 0,1-2 0,2 1 0,0-2 0,0 2 0,0-1 0,-1 1 0,-1-1 0,-1 1 0,1-1 0,1-2 0,3 1 0,1-1 0,0 0 0,0-1 0,2 0 0,-2 0 0,-1 0 0,-4 0 0,-6 0 0,-8 0 0,-5 0 0,2 2 0,3 0 0,7 0 0,6 0 0,3-2 0,1 0 0,-11 0 0,-7 0 0,-4 0 0,3 2 0,10 0 0,6 1 0,3-2 0,-2-1 0,-2 0 0,-6 0 0,-6 0 0,1 0 0,2 0 0,4 0 0,2 0 0,0 0 0,0 0 0,0 0 0,0 0 0,0 0 0,-3 0 0,-1 0 0,-2-2 0,-2 0 0,-2-2 0,-2-3 0,-5-2 0,-6-3 0,-4-3 0,-2-1 0,5 1 0,10 0 0,7 3 0,6 0 0,-2 0 0,-3-2 0,-4-3 0,1-1 0,3 0 0,1 0 0,0 1 0,-2-4 0,1 0 0,2-3 0,1 1 0,0 0 0,0 0 0,-1 0 0,-3-6 0,2-1 0,0-2 0,0 0 0,6 3 0,-1-2 0,2-2 0,-1-5 0,1 0 0,4-1 0,1-4 0,5 0 0,0-3 0,-1 2 0,4 7 0,-1 1 0,3 2 0,0-2 0,0-4 0,0-4 0,0-2 0,0 0 0,0 4 0,0 2 0,0 1 0,3 1 0,5 1 0,5 1 0,5 1 0,2-2 0,0 0 0,0 1 0,-1 5 0,0 5 0,-1 2 0,2 0 0,7-3 0,6-1 0,6-4 0,7-3 0,0-1 0,4 1 0,-2 4 0,-4 8 0,-5 6 0,-3 2 0,2 2 0,1-2 0,7-1 0,0 3 0,1 1 0,-4 4 0,-7 4 0,-3 1 0,-4 3 0,1 0 0,3 0 0,3 0 0,3 0 0,3 0 0,1 0 0,-1 0 0,0 0 0,-1 1 0,-5 1 0,-5 1 0,-7-1 0,-7-2 0,-3 0 0,-3 0 0,3 2 0,9 1 0,11 1 0,6 1 0,2 0 0,-9-1 0,-8-1 0,-4-1 0,2-2 0,1 0 0,1 0 0,-1 0 0,-6 2 0,-3 1 0,-7 0 0,-1 1 0,-1-3 0,2-1 0,2 1 0,0-1 0,2 0 0,2 0 0,0 0 0,-3-2 0,-1 0 0,-3-1 0,1 1 0,-1 2 0,0 0 0,0 0 0,-4 0 0,1 0 0</inkml:trace>
-</inkml:ink>
-</file>
-
 <file path=ppt/slideLayouts/slideLayout1.xml><?xml version="1.0" encoding="utf-8"?>
 <p:sldLayout xmlns:a="http://schemas.openxmlformats.org/drawingml/2006/main" xmlns:r="http://schemas.openxmlformats.org/officeDocument/2006/relationships" xmlns:p="http://schemas.openxmlformats.org/presentationml/2006/main" type="title" preserve="1">
   <p:cSld name="Title Slide">
@@ -2536,16 +2452,13 @@
               </a:schemeClr>
             </a:gs>
             <a:gs pos="53000">
-              <a:srgbClr val="92D050">
-                <a:lumMod val="58000"/>
-                <a:lumOff val="42000"/>
-                <a:alpha val="21000"/>
+              <a:srgbClr val="002060">
+                <a:alpha val="0"/>
               </a:srgbClr>
             </a:gs>
             <a:gs pos="100000">
-              <a:srgbClr val="92D050">
-                <a:lumMod val="19000"/>
-                <a:lumOff val="81000"/>
+              <a:srgbClr val="83A5FD">
+                <a:alpha val="30226"/>
               </a:srgbClr>
             </a:gs>
           </a:gsLst>
@@ -3799,57 +3712,6 @@
           </a:prstGeom>
         </p:spPr>
       </p:pic>
-      <mc:AlternateContent xmlns:mc="http://schemas.openxmlformats.org/markup-compatibility/2006" xmlns:p14="http://schemas.microsoft.com/office/powerpoint/2010/main">
-        <mc:Choice Requires="p14">
-          <p:contentPart p14:bwMode="auto" r:id="rId3">
-            <p14:nvContentPartPr>
-              <p14:cNvPr id="10" name="Ink 9">
-                <a:extLst>
-                  <a:ext uri="{FF2B5EF4-FFF2-40B4-BE49-F238E27FC236}">
-                    <a16:creationId xmlns:a16="http://schemas.microsoft.com/office/drawing/2014/main" id="{6ABE19FB-FC46-BF8A-9B98-5A40E8E8AA71}"/>
-                  </a:ext>
-                </a:extLst>
-              </p14:cNvPr>
-              <p14:cNvContentPartPr/>
-              <p14:nvPr/>
-            </p14:nvContentPartPr>
-            <p14:xfrm>
-              <a:off x="5733000" y="6065656"/>
-              <a:ext cx="930960" cy="744480"/>
-            </p14:xfrm>
-          </p:contentPart>
-        </mc:Choice>
-        <mc:Fallback xmlns="">
-          <p:pic>
-            <p:nvPicPr>
-              <p:cNvPr id="10" name="Ink 9">
-                <a:extLst>
-                  <a:ext uri="{FF2B5EF4-FFF2-40B4-BE49-F238E27FC236}">
-                    <a16:creationId xmlns:a16="http://schemas.microsoft.com/office/drawing/2014/main" id="{6ABE19FB-FC46-BF8A-9B98-5A40E8E8AA71}"/>
-                  </a:ext>
-                </a:extLst>
-              </p:cNvPr>
-              <p:cNvPicPr/>
-              <p:nvPr/>
-            </p:nvPicPr>
-            <p:blipFill>
-              <a:blip r:embed="rId4"/>
-              <a:stretch>
-                <a:fillRect/>
-              </a:stretch>
-            </p:blipFill>
-            <p:spPr>
-              <a:xfrm>
-                <a:off x="5724000" y="6056656"/>
-                <a:ext cx="948600" cy="762120"/>
-              </a:xfrm>
-              <a:prstGeom prst="rect">
-                <a:avLst/>
-              </a:prstGeom>
-            </p:spPr>
-          </p:pic>
-        </mc:Fallback>
-      </mc:AlternateContent>
       <p:sp>
         <p:nvSpPr>
           <p:cNvPr id="18" name="TextBox 17">
@@ -5061,6 +4923,58 @@
           </a:p>
         </p:txBody>
       </p:sp>
+      <p:sp>
+        <p:nvSpPr>
+          <p:cNvPr id="9" name="Rectangle 8">
+            <a:extLst>
+              <a:ext uri="{FF2B5EF4-FFF2-40B4-BE49-F238E27FC236}">
+                <a16:creationId xmlns:a16="http://schemas.microsoft.com/office/drawing/2014/main" id="{AC05C25E-AFFA-2445-3E16-8B5E9D7F50B1}"/>
+              </a:ext>
+            </a:extLst>
+          </p:cNvPr>
+          <p:cNvSpPr/>
+          <p:nvPr/>
+        </p:nvSpPr>
+        <p:spPr>
+          <a:xfrm>
+            <a:off x="5324480" y="6011683"/>
+            <a:ext cx="1791093" cy="669303"/>
+          </a:xfrm>
+          <a:prstGeom prst="rect">
+            <a:avLst/>
+          </a:prstGeom>
+          <a:noFill/>
+          <a:ln>
+            <a:solidFill>
+              <a:srgbClr val="FF0000"/>
+            </a:solidFill>
+          </a:ln>
+        </p:spPr>
+        <p:style>
+          <a:lnRef idx="2">
+            <a:schemeClr val="accent1">
+              <a:shade val="15000"/>
+            </a:schemeClr>
+          </a:lnRef>
+          <a:fillRef idx="1">
+            <a:schemeClr val="accent1"/>
+          </a:fillRef>
+          <a:effectRef idx="0">
+            <a:schemeClr val="accent1"/>
+          </a:effectRef>
+          <a:fontRef idx="minor">
+            <a:schemeClr val="lt1"/>
+          </a:fontRef>
+        </p:style>
+        <p:txBody>
+          <a:bodyPr rtlCol="0" anchor="ctr"/>
+          <a:lstStyle/>
+          <a:p>
+            <a:pPr algn="ctr"/>
+            <a:endParaRPr lang="en-US"/>
+          </a:p>
+        </p:txBody>
+      </p:sp>
     </p:spTree>
     <p:extLst>
       <p:ext uri="{BB962C8B-B14F-4D97-AF65-F5344CB8AC3E}">
@@ -19775,57 +19689,6 @@
           </a:p>
         </p:txBody>
       </p:sp>
-      <mc:AlternateContent xmlns:mc="http://schemas.openxmlformats.org/markup-compatibility/2006" xmlns:p14="http://schemas.microsoft.com/office/powerpoint/2010/main">
-        <mc:Choice Requires="p14">
-          <p:contentPart p14:bwMode="auto" r:id="rId3">
-            <p14:nvContentPartPr>
-              <p14:cNvPr id="30" name="Ink 29">
-                <a:extLst>
-                  <a:ext uri="{FF2B5EF4-FFF2-40B4-BE49-F238E27FC236}">
-                    <a16:creationId xmlns:a16="http://schemas.microsoft.com/office/drawing/2014/main" id="{D9288666-691E-77AB-7043-37CE723DBC38}"/>
-                  </a:ext>
-                </a:extLst>
-              </p14:cNvPr>
-              <p14:cNvContentPartPr/>
-              <p14:nvPr/>
-            </p14:nvContentPartPr>
-            <p14:xfrm>
-              <a:off x="3570136" y="5171776"/>
-              <a:ext cx="2228400" cy="909000"/>
-            </p14:xfrm>
-          </p:contentPart>
-        </mc:Choice>
-        <mc:Fallback xmlns="">
-          <p:pic>
-            <p:nvPicPr>
-              <p:cNvPr id="30" name="Ink 29">
-                <a:extLst>
-                  <a:ext uri="{FF2B5EF4-FFF2-40B4-BE49-F238E27FC236}">
-                    <a16:creationId xmlns:a16="http://schemas.microsoft.com/office/drawing/2014/main" id="{D9288666-691E-77AB-7043-37CE723DBC38}"/>
-                  </a:ext>
-                </a:extLst>
-              </p:cNvPr>
-              <p:cNvPicPr/>
-              <p:nvPr/>
-            </p:nvPicPr>
-            <p:blipFill>
-              <a:blip r:embed="rId4"/>
-              <a:stretch>
-                <a:fillRect/>
-              </a:stretch>
-            </p:blipFill>
-            <p:spPr>
-              <a:xfrm>
-                <a:off x="3561136" y="5163136"/>
-                <a:ext cx="2246040" cy="926640"/>
-              </a:xfrm>
-              <a:prstGeom prst="rect">
-                <a:avLst/>
-              </a:prstGeom>
-            </p:spPr>
-          </p:pic>
-        </mc:Fallback>
-      </mc:AlternateContent>
       <p:sp>
         <p:nvSpPr>
           <p:cNvPr id="3" name="Cloud 2">
@@ -19931,7 +19794,7 @@
           <p:nvPr/>
         </p:nvPicPr>
         <p:blipFill>
-          <a:blip r:embed="rId5">
+          <a:blip r:embed="rId3">
             <a:extLst>
               <a:ext uri="{28A0092B-C50C-407E-A947-70E740481C1C}">
                 <a14:useLocalDpi xmlns:a14="http://schemas.microsoft.com/office/drawing/2010/main" val="0"/>
@@ -20025,6 +19888,58 @@
               <a:rPr lang="en-US" dirty="0"/>
               <a:t>x</a:t>
             </a:r>
+          </a:p>
+        </p:txBody>
+      </p:sp>
+      <p:sp>
+        <p:nvSpPr>
+          <p:cNvPr id="8" name="Rectangle 7">
+            <a:extLst>
+              <a:ext uri="{FF2B5EF4-FFF2-40B4-BE49-F238E27FC236}">
+                <a16:creationId xmlns:a16="http://schemas.microsoft.com/office/drawing/2014/main" id="{CE13A752-30BC-A30D-B89D-768A20F322D7}"/>
+              </a:ext>
+            </a:extLst>
+          </p:cNvPr>
+          <p:cNvSpPr/>
+          <p:nvPr/>
+        </p:nvSpPr>
+        <p:spPr>
+          <a:xfrm>
+            <a:off x="3733015" y="5210666"/>
+            <a:ext cx="1791093" cy="669303"/>
+          </a:xfrm>
+          <a:prstGeom prst="rect">
+            <a:avLst/>
+          </a:prstGeom>
+          <a:noFill/>
+          <a:ln>
+            <a:solidFill>
+              <a:srgbClr val="FF0000"/>
+            </a:solidFill>
+          </a:ln>
+        </p:spPr>
+        <p:style>
+          <a:lnRef idx="2">
+            <a:schemeClr val="accent1">
+              <a:shade val="15000"/>
+            </a:schemeClr>
+          </a:lnRef>
+          <a:fillRef idx="1">
+            <a:schemeClr val="accent1"/>
+          </a:fillRef>
+          <a:effectRef idx="0">
+            <a:schemeClr val="accent1"/>
+          </a:effectRef>
+          <a:fontRef idx="minor">
+            <a:schemeClr val="lt1"/>
+          </a:fontRef>
+        </p:style>
+        <p:txBody>
+          <a:bodyPr rtlCol="0" anchor="ctr"/>
+          <a:lstStyle/>
+          <a:p>
+            <a:pPr algn="ctr"/>
+            <a:endParaRPr lang="en-US"/>
           </a:p>
         </p:txBody>
       </p:sp>
@@ -20451,57 +20366,6 @@
           </a:p>
         </p:txBody>
       </p:sp>
-      <mc:AlternateContent xmlns:mc="http://schemas.openxmlformats.org/markup-compatibility/2006" xmlns:p14="http://schemas.microsoft.com/office/powerpoint/2010/main">
-        <mc:Choice Requires="p14">
-          <p:contentPart p14:bwMode="auto" r:id="rId3">
-            <p14:nvContentPartPr>
-              <p14:cNvPr id="16" name="Ink 15">
-                <a:extLst>
-                  <a:ext uri="{FF2B5EF4-FFF2-40B4-BE49-F238E27FC236}">
-                    <a16:creationId xmlns:a16="http://schemas.microsoft.com/office/drawing/2014/main" id="{60943C14-34C0-605D-999C-7A68FCD1886A}"/>
-                  </a:ext>
-                </a:extLst>
-              </p14:cNvPr>
-              <p14:cNvContentPartPr/>
-              <p14:nvPr/>
-            </p14:nvContentPartPr>
-            <p14:xfrm>
-              <a:off x="6908400" y="5325496"/>
-              <a:ext cx="1995480" cy="752760"/>
-            </p14:xfrm>
-          </p:contentPart>
-        </mc:Choice>
-        <mc:Fallback xmlns="">
-          <p:pic>
-            <p:nvPicPr>
-              <p:cNvPr id="16" name="Ink 15">
-                <a:extLst>
-                  <a:ext uri="{FF2B5EF4-FFF2-40B4-BE49-F238E27FC236}">
-                    <a16:creationId xmlns:a16="http://schemas.microsoft.com/office/drawing/2014/main" id="{60943C14-34C0-605D-999C-7A68FCD1886A}"/>
-                  </a:ext>
-                </a:extLst>
-              </p:cNvPr>
-              <p:cNvPicPr/>
-              <p:nvPr/>
-            </p:nvPicPr>
-            <p:blipFill>
-              <a:blip r:embed="rId4"/>
-              <a:stretch>
-                <a:fillRect/>
-              </a:stretch>
-            </p:blipFill>
-            <p:spPr>
-              <a:xfrm>
-                <a:off x="6899760" y="5316856"/>
-                <a:ext cx="2013120" cy="770400"/>
-              </a:xfrm>
-              <a:prstGeom prst="rect">
-                <a:avLst/>
-              </a:prstGeom>
-            </p:spPr>
-          </p:pic>
-        </mc:Fallback>
-      </mc:AlternateContent>
       <p:sp>
         <p:nvSpPr>
           <p:cNvPr id="4" name="Cloud 3">
@@ -20607,7 +20471,7 @@
           <p:nvPr/>
         </p:nvPicPr>
         <p:blipFill>
-          <a:blip r:embed="rId5">
+          <a:blip r:embed="rId3">
             <a:extLst>
               <a:ext uri="{28A0092B-C50C-407E-A947-70E740481C1C}">
                 <a14:useLocalDpi xmlns:a14="http://schemas.microsoft.com/office/drawing/2010/main" val="0"/>
@@ -20654,7 +20518,7 @@
           <p:nvPr/>
         </p:nvPicPr>
         <p:blipFill>
-          <a:blip r:embed="rId6"/>
+          <a:blip r:embed="rId4"/>
           <a:stretch>
             <a:fillRect/>
           </a:stretch>
@@ -20701,6 +20565,58 @@
               <a:rPr lang="en-US" dirty="0"/>
               <a:t>x</a:t>
             </a:r>
+          </a:p>
+        </p:txBody>
+      </p:sp>
+      <p:sp>
+        <p:nvSpPr>
+          <p:cNvPr id="15" name="Rectangle 14">
+            <a:extLst>
+              <a:ext uri="{FF2B5EF4-FFF2-40B4-BE49-F238E27FC236}">
+                <a16:creationId xmlns:a16="http://schemas.microsoft.com/office/drawing/2014/main" id="{752CE9C2-62A8-AD30-D6B5-A1C4BB27701A}"/>
+              </a:ext>
+            </a:extLst>
+          </p:cNvPr>
+          <p:cNvSpPr/>
+          <p:nvPr/>
+        </p:nvSpPr>
+        <p:spPr>
+          <a:xfrm>
+            <a:off x="6738305" y="5238947"/>
+            <a:ext cx="1791093" cy="669303"/>
+          </a:xfrm>
+          <a:prstGeom prst="rect">
+            <a:avLst/>
+          </a:prstGeom>
+          <a:noFill/>
+          <a:ln>
+            <a:solidFill>
+              <a:srgbClr val="FF0000"/>
+            </a:solidFill>
+          </a:ln>
+        </p:spPr>
+        <p:style>
+          <a:lnRef idx="2">
+            <a:schemeClr val="accent1">
+              <a:shade val="15000"/>
+            </a:schemeClr>
+          </a:lnRef>
+          <a:fillRef idx="1">
+            <a:schemeClr val="accent1"/>
+          </a:fillRef>
+          <a:effectRef idx="0">
+            <a:schemeClr val="accent1"/>
+          </a:effectRef>
+          <a:fontRef idx="minor">
+            <a:schemeClr val="lt1"/>
+          </a:fontRef>
+        </p:style>
+        <p:txBody>
+          <a:bodyPr rtlCol="0" anchor="ctr"/>
+          <a:lstStyle/>
+          <a:p>
+            <a:pPr algn="ctr"/>
+            <a:endParaRPr lang="en-US"/>
           </a:p>
         </p:txBody>
       </p:sp>
